--- a/Calendario2025/Ejercicios/E2_VLAN/Ejer2_VLANs.pptx
+++ b/Calendario2025/Ejercicios/E2_VLAN/Ejer2_VLANs.pptx
@@ -1187,7 +1187,7 @@
           <a:p>
             <a:fld id="{1D8BD707-D9CF-40AE-B4C6-C98DA3205C09}" type="datetimeFigureOut">
               <a:rPr lang="en-US"/>
-              <a:t>5/7/2024</a:t>
+              <a:t>5/6/2025</a:t>
             </a:fld>
             <a:endParaRPr lang="en-US" dirty="0"/>
           </a:p>
@@ -1364,7 +1364,7 @@
           <a:p>
             <a:fld id="{1D8BD707-D9CF-40AE-B4C6-C98DA3205C09}" type="datetimeFigureOut">
               <a:rPr lang="en-US"/>
-              <a:t>5/7/2024</a:t>
+              <a:t>5/6/2025</a:t>
             </a:fld>
             <a:endParaRPr lang="en-US" dirty="0"/>
           </a:p>
@@ -1578,7 +1578,7 @@
           <a:p>
             <a:fld id="{1D8BD707-D9CF-40AE-B4C6-C98DA3205C09}" type="datetimeFigureOut">
               <a:rPr lang="en-US"/>
-              <a:t>5/7/2024</a:t>
+              <a:t>5/6/2025</a:t>
             </a:fld>
             <a:endParaRPr lang="en-US" dirty="0"/>
           </a:p>
@@ -1726,7 +1726,7 @@
           <a:p>
             <a:fld id="{1D8BD707-D9CF-40AE-B4C6-C98DA3205C09}" type="datetimeFigureOut">
               <a:rPr lang="en-US"/>
-              <a:t>5/7/2024</a:t>
+              <a:t>5/6/2025</a:t>
             </a:fld>
             <a:endParaRPr lang="en-US" dirty="0"/>
           </a:p>
@@ -1882,7 +1882,7 @@
           <a:p>
             <a:fld id="{1D8BD707-D9CF-40AE-B4C6-C98DA3205C09}" type="datetimeFigureOut">
               <a:rPr lang="en-US"/>
-              <a:t>5/7/2024</a:t>
+              <a:t>5/6/2025</a:t>
             </a:fld>
             <a:endParaRPr lang="en-US" dirty="0"/>
           </a:p>
@@ -1967,7 +1967,7 @@
           <a:p>
             <a:fld id="{5E75A0DC-66C6-4CEC-A5EB-F8C97CEC3796}" type="datetimeFigureOut">
               <a:rPr lang="es-MX" smtClean="0"/>
-              <a:t>07/05/2024</a:t>
+              <a:t>06/05/2025</a:t>
             </a:fld>
             <a:endParaRPr lang="es-MX" dirty="0"/>
           </a:p>
@@ -2224,7 +2224,7 @@
           <a:p>
             <a:fld id="{5E75A0DC-66C6-4CEC-A5EB-F8C97CEC3796}" type="datetimeFigureOut">
               <a:rPr lang="es-MX" smtClean="0"/>
-              <a:t>07/05/2024</a:t>
+              <a:t>06/05/2025</a:t>
             </a:fld>
             <a:endParaRPr lang="es-MX" dirty="0"/>
           </a:p>
@@ -2474,7 +2474,7 @@
           <a:p>
             <a:fld id="{1D8BD707-D9CF-40AE-B4C6-C98DA3205C09}" type="datetimeFigureOut">
               <a:rPr lang="en-US"/>
-              <a:t>5/7/2024</a:t>
+              <a:t>5/6/2025</a:t>
             </a:fld>
             <a:endParaRPr lang="en-US" dirty="0"/>
           </a:p>
@@ -8005,7 +8005,7 @@
           <p:nvPr>
             <p:extLst>
               <p:ext uri="{D42A27DB-BD31-4B8C-83A1-F6EECF244321}">
-                <p14:modId xmlns:p14="http://schemas.microsoft.com/office/powerpoint/2010/main" val="445936350"/>
+                <p14:modId xmlns:p14="http://schemas.microsoft.com/office/powerpoint/2010/main" val="300173855"/>
               </p:ext>
             </p:extLst>
           </p:nvPr>
@@ -10085,7 +10085,7 @@
                           <a:ea typeface="Calibri" panose="020F0502020204030204" pitchFamily="34" charset="0"/>
                           <a:cs typeface="Arial" panose="020B0604020202020204" pitchFamily="34" charset="0"/>
                         </a:rPr>
-                        <a:t>2</a:t>
+                        <a:t>4</a:t>
                       </a:r>
                     </a:p>
                   </a:txBody>
@@ -11550,7 +11550,7 @@
         </p:nvSpPr>
         <p:spPr>
           <a:xfrm>
-            <a:off x="4619892" y="5827526"/>
+            <a:off x="5133794" y="5233564"/>
             <a:ext cx="1600200" cy="504807"/>
           </a:xfrm>
           <a:prstGeom prst="roundRect">
@@ -11601,7 +11601,7 @@
                   <a:schemeClr val="tx1"/>
                 </a:solidFill>
               </a:rPr>
-              <a:t>192.168.1.152 /30</a:t>
+              <a:t>192.168.1.152 /29</a:t>
             </a:r>
             <a:endParaRPr lang="es-MX" sz="1200" b="1" dirty="0">
               <a:solidFill>
@@ -11625,7 +11625,7 @@
         </p:nvSpPr>
         <p:spPr>
           <a:xfrm>
-            <a:off x="6429982" y="5867399"/>
+            <a:off x="6822830" y="5233566"/>
             <a:ext cx="1600200" cy="504807"/>
           </a:xfrm>
           <a:prstGeom prst="roundRect">
@@ -11697,7 +11697,7 @@
         </p:nvSpPr>
         <p:spPr>
           <a:xfrm>
-            <a:off x="10058400" y="5867399"/>
+            <a:off x="10285340" y="5228811"/>
             <a:ext cx="1600200" cy="504807"/>
           </a:xfrm>
           <a:prstGeom prst="roundRect">
@@ -11769,7 +11769,7 @@
         </p:nvSpPr>
         <p:spPr>
           <a:xfrm>
-            <a:off x="8244191" y="5867400"/>
+            <a:off x="8554085" y="5233565"/>
             <a:ext cx="1600200" cy="504807"/>
           </a:xfrm>
           <a:prstGeom prst="roundRect">
@@ -11849,7 +11849,7 @@
         </p:blipFill>
         <p:spPr>
           <a:xfrm>
-            <a:off x="4829783" y="1905000"/>
+            <a:off x="4829783" y="1676400"/>
             <a:ext cx="6828817" cy="3352800"/>
           </a:xfrm>
           <a:prstGeom prst="rect">
@@ -12921,7 +12921,7 @@
           <p:nvPr>
             <p:extLst>
               <p:ext uri="{D42A27DB-BD31-4B8C-83A1-F6EECF244321}">
-                <p14:modId xmlns:p14="http://schemas.microsoft.com/office/powerpoint/2010/main" val="3786402871"/>
+                <p14:modId xmlns:p14="http://schemas.microsoft.com/office/powerpoint/2010/main" val="4260595657"/>
               </p:ext>
             </p:extLst>
           </p:nvPr>
@@ -14535,7 +14535,7 @@
                           <a:ea typeface="Calibri" panose="020F0502020204030204" pitchFamily="34" charset="0"/>
                           <a:cs typeface="Arial" panose="020B0604020202020204" pitchFamily="34" charset="0"/>
                         </a:rPr>
-                        <a:t>1</a:t>
+                        <a:t>4</a:t>
                       </a:r>
                     </a:p>
                   </a:txBody>
